--- a/artifacts/speaking-portfolio-expanded/talks/failure-improvement/failure-improvement-40min-screen.pptx
+++ b/artifacts/speaking-portfolio-expanded/talks/failure-improvement/failure-improvement-40min-screen.pptx
@@ -3495,7 +3495,7 @@
                 <a:ea typeface="Arial"/>
                 <a:cs typeface="Arial"/>
               </a:rPr>
-              <a:t xml:space="preserve">![Enrichment earns the next step](../../reveal-talks/assets/failure-improvement/enrichment.svg)</a:t>
+              <a:t xml:space="preserve">![Enrichment earns the next step](../../../../public/talks/assets/failure-improvement/enrichment.svg)</a:t>
             </a:r>
             <a:endParaRPr lang="en-US" sz="1200"/>
           </a:p>
@@ -3953,7 +3953,7 @@
                 <a:ea typeface="Arial"/>
                 <a:cs typeface="Arial"/>
               </a:rPr>
-              <a:t xml:space="preserve">![The out-of-band check](../../reveal-talks/assets/failure-improvement/check.svg)</a:t>
+              <a:t xml:space="preserve">![The out-of-band check](../../../../public/talks/assets/failure-improvement/check.svg)</a:t>
             </a:r>
             <a:endParaRPr lang="en-US" sz="1200"/>
           </a:p>
